--- a/presentation/java-openshift-optimization.pptx
+++ b/presentation/java-openshift-optimization.pptx
@@ -76,6 +76,7 @@
     <p:sldId id="324" r:id="rId70"/>
     <p:sldId id="325" r:id="rId71"/>
     <p:sldId id="326" r:id="rId72"/>
+    <p:sldId id="327" r:id="rId78"/>
   </p:sldIdLst>
   <p:notesMasterIdLst>
     <p:notesMasterId r:id="rId73"/>
@@ -40309,6 +40310,428 @@
 </p:sld>
 </file>
 
+<file path=ppt/slides/slide72.xml><?xml version="1.0" encoding="utf-8"?>
+<p:sld xmlns:a="http://schemas.openxmlformats.org/drawingml/2006/main" xmlns:p="http://schemas.openxmlformats.org/presentationml/2006/main" xmlns:r="http://schemas.openxmlformats.org/officeDocument/2006/relationships">
+  <p:bg>
+    <p:bgPr>
+      <a:solidFill>
+        <a:srgbClr val="FFFFFF"/>
+      </a:solidFill>
+      <a:effectLst/>
+    </p:bgPr>
+  </p:bg>
+  <p:cSld>
+    <p:spTree>
+      <p:nvGrpSpPr>
+        <p:cNvPr id="1" name=""/>
+        <p:cNvGrpSpPr/>
+        <p:nvPr/>
+      </p:nvGrpSpPr>
+      <p:grpSpPr/>
+      <p:sp>
+        <p:nvSpPr>
+          <p:cNvPr id="2" name="TextBox 1"/>
+          <p:cNvSpPr txBox="1"/>
+          <p:nvPr/>
+        </p:nvSpPr>
+        <p:spPr>
+          <a:xfrm>
+            <a:off x="566942" y="384057"/>
+            <a:ext cx="11055372" cy="292615"/>
+          </a:xfrm>
+          <a:prstGeom prst="rect">
+            <a:avLst/>
+          </a:prstGeom>
+          <a:noFill/>
+        </p:spPr>
+        <p:txBody>
+          <a:bodyPr wrap="square" lIns="0" rIns="0" tIns="0" bIns="0" anchor="ctr">
+            <a:spAutoFit/>
+          </a:bodyPr>
+          <a:lstStyle/>
+          <a:p>
+            <a:pPr algn="l"/>
+            <a:r>
+              <a:rPr sz="1200" b="1" i="0" spc="400">
+                <a:solidFill>
+                  <a:srgbClr val="EE0000"/>
+                </a:solidFill>
+                <a:latin typeface="Overpass"/>
+                <a:cs typeface="Overpass"/>
+              </a:rPr>
+              <a:t>SCAN TO EXPLORE</a:t>
+            </a:r>
+          </a:p>
+        </p:txBody>
+      </p:sp>
+      <p:sp>
+        <p:nvSpPr>
+          <p:cNvPr id="3" name="TextBox 2"/>
+          <p:cNvSpPr txBox="1"/>
+          <p:nvPr/>
+        </p:nvSpPr>
+        <p:spPr>
+          <a:xfrm>
+            <a:off x="566942" y="676672"/>
+            <a:ext cx="11055372" cy="1005865"/>
+          </a:xfrm>
+          <a:prstGeom prst="rect">
+            <a:avLst/>
+          </a:prstGeom>
+          <a:noFill/>
+        </p:spPr>
+        <p:txBody>
+          <a:bodyPr wrap="square" lIns="0" rIns="0" tIns="0" bIns="0" anchor="t">
+            <a:spAutoFit/>
+          </a:bodyPr>
+          <a:lstStyle/>
+          <a:p>
+            <a:pPr algn="l"/>
+            <a:r>
+              <a:rPr sz="3000" b="1" i="0">
+                <a:solidFill>
+                  <a:srgbClr val="151515"/>
+                </a:solidFill>
+                <a:latin typeface="Overpass"/>
+                <a:cs typeface="Overpass"/>
+              </a:rPr>
+              <a:t>Take it with you</a:t>
+            </a:r>
+          </a:p>
+        </p:txBody>
+      </p:sp>
+      <p:pic>
+        <p:nvPicPr>
+          <p:cNvPr id="4" name="Picture 3" descr="qr-sbo-site.png"/>
+          <p:cNvPicPr>
+            <a:picLocks noChangeAspect="1"/>
+          </p:cNvPicPr>
+          <p:nvPr/>
+        </p:nvPicPr>
+        <p:blipFill>
+          <a:blip r:embed="rId2"/>
+          <a:stretch>
+            <a:fillRect/>
+          </a:stretch>
+        </p:blipFill>
+        <p:spPr>
+          <a:xfrm>
+            <a:off x="2103172" y="1627672"/>
+            <a:ext cx="2834710" cy="2834710"/>
+          </a:xfrm>
+          <a:prstGeom prst="rect">
+            <a:avLst/>
+          </a:prstGeom>
+        </p:spPr>
+      </p:pic>
+      <p:sp>
+        <p:nvSpPr>
+          <p:cNvPr id="5" name="TextBox 4"/>
+          <p:cNvSpPr txBox="1"/>
+          <p:nvPr/>
+        </p:nvSpPr>
+        <p:spPr>
+          <a:xfrm>
+            <a:off x="1417355" y="4553825"/>
+            <a:ext cx="4206345" cy="365769"/>
+          </a:xfrm>
+          <a:prstGeom prst="rect">
+            <a:avLst/>
+          </a:prstGeom>
+          <a:noFill/>
+        </p:spPr>
+        <p:txBody>
+          <a:bodyPr wrap="square" lIns="0" rIns="0" tIns="0" bIns="0" anchor="ctr">
+            <a:spAutoFit/>
+          </a:bodyPr>
+          <a:lstStyle/>
+          <a:p>
+            <a:pPr algn="ctr"/>
+            <a:r>
+              <a:rPr sz="1800" b="1" i="0">
+                <a:solidFill>
+                  <a:srgbClr val="151515"/>
+                </a:solidFill>
+                <a:latin typeface="Overpass"/>
+                <a:cs typeface="Overpass"/>
+              </a:rPr>
+              <a:t>The site</a:t>
+            </a:r>
+          </a:p>
+        </p:txBody>
+      </p:sp>
+      <p:sp>
+        <p:nvSpPr>
+          <p:cNvPr id="6" name="TextBox 5"/>
+          <p:cNvSpPr txBox="1"/>
+          <p:nvPr/>
+        </p:nvSpPr>
+        <p:spPr>
+          <a:xfrm>
+            <a:off x="1325913" y="4937883"/>
+            <a:ext cx="4389229" cy="658384"/>
+          </a:xfrm>
+          <a:prstGeom prst="rect">
+            <a:avLst/>
+          </a:prstGeom>
+          <a:noFill/>
+        </p:spPr>
+        <p:txBody>
+          <a:bodyPr wrap="square" lIns="0" rIns="0" tIns="0" bIns="0" anchor="t">
+            <a:spAutoFit/>
+          </a:bodyPr>
+          <a:lstStyle/>
+          <a:p>
+            <a:pPr algn="ctr"/>
+            <a:r>
+              <a:rPr sz="1300" b="0" i="1">
+                <a:solidFill>
+                  <a:srgbClr val="5A5A5A"/>
+                </a:solidFill>
+                <a:latin typeface="Red Hat Text"/>
+                <a:cs typeface="Red Hat Text"/>
+              </a:rPr>
+              <a:t>Chapters, the runnable examples, and the tuning labs</a:t>
+            </a:r>
+          </a:p>
+        </p:txBody>
+      </p:sp>
+      <p:sp>
+        <p:nvSpPr>
+          <p:cNvPr id="7" name="TextBox 6"/>
+          <p:cNvSpPr txBox="1"/>
+          <p:nvPr/>
+        </p:nvSpPr>
+        <p:spPr>
+          <a:xfrm>
+            <a:off x="1325913" y="5596267"/>
+            <a:ext cx="4389229" cy="292615"/>
+          </a:xfrm>
+          <a:prstGeom prst="rect">
+            <a:avLst/>
+          </a:prstGeom>
+          <a:noFill/>
+        </p:spPr>
+        <p:txBody>
+          <a:bodyPr wrap="square" lIns="0" rIns="0" tIns="0" bIns="0" anchor="ctr">
+            <a:spAutoFit/>
+          </a:bodyPr>
+          <a:lstStyle/>
+          <a:p>
+            <a:pPr algn="ctr"/>
+            <a:r>
+              <a:rPr sz="1000" b="0" i="0">
+                <a:solidFill>
+                  <a:srgbClr val="EE0000"/>
+                </a:solidFill>
+                <a:latin typeface="Red Hat Mono"/>
+                <a:cs typeface="Red Hat Mono"/>
+              </a:rPr>
+              <a:t>patterncatalyst.github.io/spring-boot-optimization</a:t>
+            </a:r>
+          </a:p>
+        </p:txBody>
+      </p:sp>
+      <p:pic>
+        <p:nvPicPr>
+          <p:cNvPr id="8" name="Picture 7" descr="qr-hub.png"/>
+          <p:cNvPicPr>
+            <a:picLocks noChangeAspect="1"/>
+          </p:cNvPicPr>
+          <p:nvPr/>
+        </p:nvPicPr>
+        <p:blipFill>
+          <a:blip r:embed="rId3"/>
+          <a:stretch>
+            <a:fillRect/>
+          </a:stretch>
+        </p:blipFill>
+        <p:spPr>
+          <a:xfrm>
+            <a:off x="7251373" y="1627672"/>
+            <a:ext cx="2834710" cy="2834710"/>
+          </a:xfrm>
+          <a:prstGeom prst="rect">
+            <a:avLst/>
+          </a:prstGeom>
+        </p:spPr>
+      </p:pic>
+      <p:sp>
+        <p:nvSpPr>
+          <p:cNvPr id="9" name="TextBox 8"/>
+          <p:cNvSpPr txBox="1"/>
+          <p:nvPr/>
+        </p:nvSpPr>
+        <p:spPr>
+          <a:xfrm>
+            <a:off x="6565556" y="4553825"/>
+            <a:ext cx="4206345" cy="365769"/>
+          </a:xfrm>
+          <a:prstGeom prst="rect">
+            <a:avLst/>
+          </a:prstGeom>
+          <a:noFill/>
+        </p:spPr>
+        <p:txBody>
+          <a:bodyPr wrap="square" lIns="0" rIns="0" tIns="0" bIns="0" anchor="ctr">
+            <a:spAutoFit/>
+          </a:bodyPr>
+          <a:lstStyle/>
+          <a:p>
+            <a:pPr algn="ctr"/>
+            <a:r>
+              <a:rPr sz="1800" b="1" i="0">
+                <a:solidFill>
+                  <a:srgbClr val="151515"/>
+                </a:solidFill>
+                <a:latin typeface="Overpass"/>
+                <a:cs typeface="Overpass"/>
+              </a:rPr>
+              <a:t>Workshops &amp; Tutorials</a:t>
+            </a:r>
+          </a:p>
+        </p:txBody>
+      </p:sp>
+      <p:sp>
+        <p:nvSpPr>
+          <p:cNvPr id="10" name="TextBox 9"/>
+          <p:cNvSpPr txBox="1"/>
+          <p:nvPr/>
+        </p:nvSpPr>
+        <p:spPr>
+          <a:xfrm>
+            <a:off x="6474113" y="4937883"/>
+            <a:ext cx="4389229" cy="658384"/>
+          </a:xfrm>
+          <a:prstGeom prst="rect">
+            <a:avLst/>
+          </a:prstGeom>
+          <a:noFill/>
+        </p:spPr>
+        <p:txBody>
+          <a:bodyPr wrap="square" lIns="0" rIns="0" tIns="0" bIns="0" anchor="t">
+            <a:spAutoFit/>
+          </a:bodyPr>
+          <a:lstStyle/>
+          <a:p>
+            <a:pPr algn="ctr"/>
+            <a:r>
+              <a:rPr sz="1300" b="0" i="1">
+                <a:solidFill>
+                  <a:srgbClr val="5A5A5A"/>
+                </a:solidFill>
+                <a:latin typeface="Red Hat Text"/>
+                <a:cs typeface="Red Hat Text"/>
+              </a:rPr>
+              <a:t>The whole series: every workshop, tutorial, and deck in one place</a:t>
+            </a:r>
+          </a:p>
+        </p:txBody>
+      </p:sp>
+      <p:sp>
+        <p:nvSpPr>
+          <p:cNvPr id="11" name="TextBox 10"/>
+          <p:cNvSpPr txBox="1"/>
+          <p:nvPr/>
+        </p:nvSpPr>
+        <p:spPr>
+          <a:xfrm>
+            <a:off x="6474113" y="5596267"/>
+            <a:ext cx="4389229" cy="292615"/>
+          </a:xfrm>
+          <a:prstGeom prst="rect">
+            <a:avLst/>
+          </a:prstGeom>
+          <a:noFill/>
+        </p:spPr>
+        <p:txBody>
+          <a:bodyPr wrap="square" lIns="0" rIns="0" tIns="0" bIns="0" anchor="ctr">
+            <a:spAutoFit/>
+          </a:bodyPr>
+          <a:lstStyle/>
+          <a:p>
+            <a:pPr algn="ctr"/>
+            <a:r>
+              <a:rPr sz="900" b="0" i="0">
+                <a:solidFill>
+                  <a:srgbClr val="EE0000"/>
+                </a:solidFill>
+                <a:latin typeface="Red Hat Mono"/>
+                <a:cs typeface="Red Hat Mono"/>
+              </a:rPr>
+              <a:t>patterncatalyst.github.io/patterncatalyst-workshops-tutorials-list</a:t>
+            </a:r>
+          </a:p>
+        </p:txBody>
+      </p:sp>
+      <p:sp>
+        <p:nvSpPr>
+          <p:cNvPr id="12" name="TextBox 11"/>
+          <p:cNvSpPr txBox="1"/>
+          <p:nvPr/>
+        </p:nvSpPr>
+        <p:spPr>
+          <a:xfrm>
+            <a:off x="566942" y="6364383"/>
+            <a:ext cx="914422" cy="274326"/>
+          </a:xfrm>
+          <a:prstGeom prst="rect">
+            <a:avLst/>
+          </a:prstGeom>
+          <a:noFill/>
+        </p:spPr>
+        <p:txBody>
+          <a:bodyPr wrap="square" lIns="0" rIns="0" tIns="0" bIns="0" anchor="ctr">
+            <a:spAutoFit/>
+          </a:bodyPr>
+          <a:lstStyle/>
+          <a:p>
+            <a:pPr algn="l"/>
+            <a:r>
+              <a:rPr sz="1000" b="0" i="0">
+                <a:solidFill>
+                  <a:srgbClr val="8A8A8A"/>
+                </a:solidFill>
+                <a:latin typeface="Red Hat Text"/>
+                <a:cs typeface="Red Hat Text"/>
+              </a:rPr>
+              <a:t>72</a:t>
+            </a:r>
+          </a:p>
+        </p:txBody>
+      </p:sp>
+      <p:pic>
+        <p:nvPicPr>
+          <p:cNvPr id="13" name="Picture 12" descr="image.png"/>
+          <p:cNvPicPr>
+            <a:picLocks noChangeAspect="1"/>
+          </p:cNvPicPr>
+          <p:nvPr/>
+        </p:nvPicPr>
+        <p:blipFill>
+          <a:blip r:embed="rId4"/>
+          <a:stretch>
+            <a:fillRect/>
+          </a:stretch>
+        </p:blipFill>
+        <p:spPr>
+          <a:xfrm>
+            <a:off x="10561584" y="6355238"/>
+            <a:ext cx="1033297" cy="246894"/>
+          </a:xfrm>
+          <a:prstGeom prst="rect">
+            <a:avLst/>
+          </a:prstGeom>
+        </p:spPr>
+      </p:pic>
+    </p:spTree>
+  </p:cSld>
+  <p:clrMapOvr>
+    <a:masterClrMapping/>
+  </p:clrMapOvr>
+</p:sld>
+</file>
+
 <file path=ppt/slides/slide8.xml><?xml version="1.0" encoding="utf-8"?>
 <p:sld xmlns:a="http://schemas.openxmlformats.org/drawingml/2006/main" xmlns:r="http://schemas.openxmlformats.org/officeDocument/2006/relationships" xmlns:p="http://schemas.openxmlformats.org/presentationml/2006/main">
   <p:cSld name="Slide 8">
